--- a/curso/pptx/S40.pptx
+++ b/curso/pptx/S40.pptx
@@ -3890,8 +3890,8 @@
         </p:nvSpPr>
         <p:spPr>
           <a:xfrm>
-            <a:off x="640000" y="420000"/>
-            <a:ext cx="10912000" cy="420000"/>
+            <a:off x="10652000" y="380000"/>
+            <a:ext cx="900000" cy="800000"/>
           </a:xfrm>
           <a:prstGeom prst="rect">
             <a:avLst/>
@@ -3906,17 +3906,17 @@
           <a:p>
             <a:pPr>
               <a:spcAft>
-                <a:spcPts val="810"/>
+                <a:spcPts val="1980"/>
               </a:spcAft>
             </a:pPr>
             <a:r>
-              <a:rPr sz="1800" b="1">
+              <a:rPr sz="4400" b="0">
                 <a:solidFill>
                   <a:srgbClr val="1F2A44"/>
                 </a:solidFill>
                 <a:latin typeface="Nunito Sans"/>
               </a:rPr>
-              <a:t>🦉 Aula de Filosofía</a:t>
+              <a:t>🙃</a:t>
             </a:r>
           </a:p>
         </p:txBody>

--- a/curso/pptx/S40.pptx
+++ b/curso/pptx/S40.pptx
@@ -471,426 +471,6 @@
     </a:lvl9pPr>
   </p:notesStyle>
 </p:notesMaster>
-</file>
-
-<file path=ppt/notesSlides/notesSlide1.xml><?xml version="1.0" encoding="utf-8"?>
-<p:notes xmlns:a="http://schemas.openxmlformats.org/drawingml/2006/main" xmlns:p="http://schemas.openxmlformats.org/presentationml/2006/main" xmlns:r="http://schemas.openxmlformats.org/officeDocument/2006/relationships">
-  <p:cSld>
-    <p:spTree>
-      <p:nvGrpSpPr>
-        <p:cNvPr id="1" name=""/>
-        <p:cNvGrpSpPr/>
-        <p:nvPr/>
-      </p:nvGrpSpPr>
-      <p:grpSpPr>
-        <a:xfrm>
-          <a:off x="0" y="0"/>
-          <a:ext cx="0" cy="0"/>
-          <a:chOff x="0" y="0"/>
-          <a:chExt cx="0" cy="0"/>
-        </a:xfrm>
-      </p:grpSpPr>
-      <p:sp>
-        <p:nvSpPr>
-          <p:cNvPr id="2" name="Slide Image Placeholder 1"/>
-          <p:cNvSpPr>
-            <a:spLocks noGrp="1"/>
-          </p:cNvSpPr>
-          <p:nvPr>
-            <p:ph type="sldImg" idx="2"/>
-          </p:nvPr>
-        </p:nvSpPr>
-        <p:spPr/>
-      </p:sp>
-      <p:sp>
-        <p:nvSpPr>
-          <p:cNvPr id="3" name="Notes Placeholder 2"/>
-          <p:cNvSpPr>
-            <a:spLocks noGrp="1"/>
-          </p:cNvSpPr>
-          <p:nvPr>
-            <p:ph type="body" idx="3" sz="quarter"/>
-          </p:nvPr>
-        </p:nvSpPr>
-        <p:spPr/>
-        <p:txBody>
-          <a:bodyPr/>
-          <a:lstStyle/>
-          <a:p>
-            <a:r>
-              <a:t>3 minutos. Sin apuntes. Es para recordar, no cuenta para nota.</a:t>
-            </a:r>
-          </a:p>
-        </p:txBody>
-      </p:sp>
-      <p:sp>
-        <p:nvSpPr>
-          <p:cNvPr id="4" name="Slide Number Placeholder 3"/>
-          <p:cNvSpPr>
-            <a:spLocks noGrp="1"/>
-          </p:cNvSpPr>
-          <p:nvPr>
-            <p:ph type="sldNum" idx="5" sz="quarter"/>
-          </p:nvPr>
-        </p:nvSpPr>
-        <p:spPr/>
-      </p:sp>
-    </p:spTree>
-  </p:cSld>
-  <p:clrMapOvr>
-    <a:masterClrMapping/>
-  </p:clrMapOvr>
-</p:notes>
-</file>
-
-<file path=ppt/notesSlides/notesSlide2.xml><?xml version="1.0" encoding="utf-8"?>
-<p:notes xmlns:a="http://schemas.openxmlformats.org/drawingml/2006/main" xmlns:p="http://schemas.openxmlformats.org/presentationml/2006/main" xmlns:r="http://schemas.openxmlformats.org/officeDocument/2006/relationships">
-  <p:cSld>
-    <p:spTree>
-      <p:nvGrpSpPr>
-        <p:cNvPr id="1" name=""/>
-        <p:cNvGrpSpPr/>
-        <p:nvPr/>
-      </p:nvGrpSpPr>
-      <p:grpSpPr>
-        <a:xfrm>
-          <a:off x="0" y="0"/>
-          <a:ext cx="0" cy="0"/>
-          <a:chOff x="0" y="0"/>
-          <a:chExt cx="0" cy="0"/>
-        </a:xfrm>
-      </p:grpSpPr>
-      <p:sp>
-        <p:nvSpPr>
-          <p:cNvPr id="2" name="Slide Image Placeholder 1"/>
-          <p:cNvSpPr>
-            <a:spLocks noGrp="1"/>
-          </p:cNvSpPr>
-          <p:nvPr>
-            <p:ph type="sldImg" idx="2"/>
-          </p:nvPr>
-        </p:nvSpPr>
-        <p:spPr/>
-      </p:sp>
-      <p:sp>
-        <p:nvSpPr>
-          <p:cNvPr id="3" name="Notes Placeholder 2"/>
-          <p:cNvSpPr>
-            <a:spLocks noGrp="1"/>
-          </p:cNvSpPr>
-          <p:nvPr>
-            <p:ph type="body" idx="3" sz="quarter"/>
-          </p:nvPr>
-        </p:nvSpPr>
-        <p:spPr/>
-        <p:txBody>
-          <a:bodyPr/>
-          <a:lstStyle/>
-          <a:p>
-            <a:r>
-              <a:t>3 minutos. Sin apuntes. Es para recordar, no cuenta para nota.</a:t>
-            </a:r>
-          </a:p>
-        </p:txBody>
-      </p:sp>
-      <p:sp>
-        <p:nvSpPr>
-          <p:cNvPr id="4" name="Slide Number Placeholder 3"/>
-          <p:cNvSpPr>
-            <a:spLocks noGrp="1"/>
-          </p:cNvSpPr>
-          <p:nvPr>
-            <p:ph type="sldNum" idx="5" sz="quarter"/>
-          </p:nvPr>
-        </p:nvSpPr>
-        <p:spPr/>
-      </p:sp>
-    </p:spTree>
-  </p:cSld>
-  <p:clrMapOvr>
-    <a:masterClrMapping/>
-  </p:clrMapOvr>
-</p:notes>
-</file>
-
-<file path=ppt/notesSlides/notesSlide3.xml><?xml version="1.0" encoding="utf-8"?>
-<p:notes xmlns:a="http://schemas.openxmlformats.org/drawingml/2006/main" xmlns:p="http://schemas.openxmlformats.org/presentationml/2006/main" xmlns:r="http://schemas.openxmlformats.org/officeDocument/2006/relationships">
-  <p:cSld>
-    <p:spTree>
-      <p:nvGrpSpPr>
-        <p:cNvPr id="1" name=""/>
-        <p:cNvGrpSpPr/>
-        <p:nvPr/>
-      </p:nvGrpSpPr>
-      <p:grpSpPr>
-        <a:xfrm>
-          <a:off x="0" y="0"/>
-          <a:ext cx="0" cy="0"/>
-          <a:chOff x="0" y="0"/>
-          <a:chExt cx="0" cy="0"/>
-        </a:xfrm>
-      </p:grpSpPr>
-      <p:sp>
-        <p:nvSpPr>
-          <p:cNvPr id="2" name="Slide Image Placeholder 1"/>
-          <p:cNvSpPr>
-            <a:spLocks noGrp="1"/>
-          </p:cNvSpPr>
-          <p:nvPr>
-            <p:ph type="sldImg" idx="2"/>
-          </p:nvPr>
-        </p:nvSpPr>
-        <p:spPr/>
-      </p:sp>
-      <p:sp>
-        <p:nvSpPr>
-          <p:cNvPr id="3" name="Notes Placeholder 2"/>
-          <p:cNvSpPr>
-            <a:spLocks noGrp="1"/>
-          </p:cNvSpPr>
-          <p:nvPr>
-            <p:ph type="body" idx="3" sz="quarter"/>
-          </p:nvPr>
-        </p:nvSpPr>
-        <p:spPr/>
-        <p:txBody>
-          <a:bodyPr/>
-          <a:lstStyle/>
-          <a:p>
-            <a:r>
-              <a:t>Nadie tiene que contestar: solo pensarlo.</a:t>
-            </a:r>
-          </a:p>
-        </p:txBody>
-      </p:sp>
-      <p:sp>
-        <p:nvSpPr>
-          <p:cNvPr id="4" name="Slide Number Placeholder 3"/>
-          <p:cNvSpPr>
-            <a:spLocks noGrp="1"/>
-          </p:cNvSpPr>
-          <p:nvPr>
-            <p:ph type="sldNum" idx="5" sz="quarter"/>
-          </p:nvPr>
-        </p:nvSpPr>
-        <p:spPr/>
-      </p:sp>
-    </p:spTree>
-  </p:cSld>
-  <p:clrMapOvr>
-    <a:masterClrMapping/>
-  </p:clrMapOvr>
-</p:notes>
-</file>
-
-<file path=ppt/notesSlides/notesSlide4.xml><?xml version="1.0" encoding="utf-8"?>
-<p:notes xmlns:a="http://schemas.openxmlformats.org/drawingml/2006/main" xmlns:p="http://schemas.openxmlformats.org/presentationml/2006/main" xmlns:r="http://schemas.openxmlformats.org/officeDocument/2006/relationships">
-  <p:cSld>
-    <p:spTree>
-      <p:nvGrpSpPr>
-        <p:cNvPr id="1" name=""/>
-        <p:cNvGrpSpPr/>
-        <p:nvPr/>
-      </p:nvGrpSpPr>
-      <p:grpSpPr>
-        <a:xfrm>
-          <a:off x="0" y="0"/>
-          <a:ext cx="0" cy="0"/>
-          <a:chOff x="0" y="0"/>
-          <a:chExt cx="0" cy="0"/>
-        </a:xfrm>
-      </p:grpSpPr>
-      <p:sp>
-        <p:nvSpPr>
-          <p:cNvPr id="2" name="Slide Image Placeholder 1"/>
-          <p:cNvSpPr>
-            <a:spLocks noGrp="1"/>
-          </p:cNvSpPr>
-          <p:nvPr>
-            <p:ph type="sldImg" idx="2"/>
-          </p:nvPr>
-        </p:nvSpPr>
-        <p:spPr/>
-      </p:sp>
-      <p:sp>
-        <p:nvSpPr>
-          <p:cNvPr id="3" name="Notes Placeholder 2"/>
-          <p:cNvSpPr>
-            <a:spLocks noGrp="1"/>
-          </p:cNvSpPr>
-          <p:nvPr>
-            <p:ph type="body" idx="3" sz="quarter"/>
-          </p:nvPr>
-        </p:nvSpPr>
-        <p:spPr/>
-        <p:txBody>
-          <a:bodyPr/>
-          <a:lstStyle/>
-          <a:p>
-            <a:r>
-              <a:t>Dejar unos segundos para que piensen la respuesta fácil antes de enseñar los pasos.</a:t>
-            </a:r>
-          </a:p>
-        </p:txBody>
-      </p:sp>
-      <p:sp>
-        <p:nvSpPr>
-          <p:cNvPr id="4" name="Slide Number Placeholder 3"/>
-          <p:cNvSpPr>
-            <a:spLocks noGrp="1"/>
-          </p:cNvSpPr>
-          <p:nvPr>
-            <p:ph type="sldNum" idx="5" sz="quarter"/>
-          </p:nvPr>
-        </p:nvSpPr>
-        <p:spPr/>
-      </p:sp>
-    </p:spTree>
-  </p:cSld>
-  <p:clrMapOvr>
-    <a:masterClrMapping/>
-  </p:clrMapOvr>
-</p:notes>
-</file>
-
-<file path=ppt/notesSlides/notesSlide5.xml><?xml version="1.0" encoding="utf-8"?>
-<p:notes xmlns:a="http://schemas.openxmlformats.org/drawingml/2006/main" xmlns:p="http://schemas.openxmlformats.org/presentationml/2006/main" xmlns:r="http://schemas.openxmlformats.org/officeDocument/2006/relationships">
-  <p:cSld>
-    <p:spTree>
-      <p:nvGrpSpPr>
-        <p:cNvPr id="1" name=""/>
-        <p:cNvGrpSpPr/>
-        <p:nvPr/>
-      </p:nvGrpSpPr>
-      <p:grpSpPr>
-        <a:xfrm>
-          <a:off x="0" y="0"/>
-          <a:ext cx="0" cy="0"/>
-          <a:chOff x="0" y="0"/>
-          <a:chExt cx="0" cy="0"/>
-        </a:xfrm>
-      </p:grpSpPr>
-      <p:sp>
-        <p:nvSpPr>
-          <p:cNvPr id="2" name="Slide Image Placeholder 1"/>
-          <p:cNvSpPr>
-            <a:spLocks noGrp="1"/>
-          </p:cNvSpPr>
-          <p:nvPr>
-            <p:ph type="sldImg" idx="2"/>
-          </p:nvPr>
-        </p:nvSpPr>
-        <p:spPr/>
-      </p:sp>
-      <p:sp>
-        <p:nvSpPr>
-          <p:cNvPr id="3" name="Notes Placeholder 2"/>
-          <p:cNvSpPr>
-            <a:spLocks noGrp="1"/>
-          </p:cNvSpPr>
-          <p:nvPr>
-            <p:ph type="body" idx="3" sz="quarter"/>
-          </p:nvPr>
-        </p:nvSpPr>
-        <p:spPr/>
-        <p:txBody>
-          <a:bodyPr/>
-          <a:lstStyle/>
-          <a:p>
-            <a:r>
-              <a:t>Dejar 2 minutos para que lo escriban. La diapositiva siguiente muestra el resumen.</a:t>
-            </a:r>
-          </a:p>
-        </p:txBody>
-      </p:sp>
-      <p:sp>
-        <p:nvSpPr>
-          <p:cNvPr id="4" name="Slide Number Placeholder 3"/>
-          <p:cNvSpPr>
-            <a:spLocks noGrp="1"/>
-          </p:cNvSpPr>
-          <p:nvPr>
-            <p:ph type="sldNum" idx="5" sz="quarter"/>
-          </p:nvPr>
-        </p:nvSpPr>
-        <p:spPr/>
-      </p:sp>
-    </p:spTree>
-  </p:cSld>
-  <p:clrMapOvr>
-    <a:masterClrMapping/>
-  </p:clrMapOvr>
-</p:notes>
-</file>
-
-<file path=ppt/notesSlides/notesSlide6.xml><?xml version="1.0" encoding="utf-8"?>
-<p:notes xmlns:a="http://schemas.openxmlformats.org/drawingml/2006/main" xmlns:p="http://schemas.openxmlformats.org/presentationml/2006/main" xmlns:r="http://schemas.openxmlformats.org/officeDocument/2006/relationships">
-  <p:cSld>
-    <p:spTree>
-      <p:nvGrpSpPr>
-        <p:cNvPr id="1" name=""/>
-        <p:cNvGrpSpPr/>
-        <p:nvPr/>
-      </p:nvGrpSpPr>
-      <p:grpSpPr>
-        <a:xfrm>
-          <a:off x="0" y="0"/>
-          <a:ext cx="0" cy="0"/>
-          <a:chOff x="0" y="0"/>
-          <a:chExt cx="0" cy="0"/>
-        </a:xfrm>
-      </p:grpSpPr>
-      <p:sp>
-        <p:nvSpPr>
-          <p:cNvPr id="2" name="Slide Image Placeholder 1"/>
-          <p:cNvSpPr>
-            <a:spLocks noGrp="1"/>
-          </p:cNvSpPr>
-          <p:nvPr>
-            <p:ph type="sldImg" idx="2"/>
-          </p:nvPr>
-        </p:nvSpPr>
-        <p:spPr/>
-      </p:sp>
-      <p:sp>
-        <p:nvSpPr>
-          <p:cNvPr id="3" name="Notes Placeholder 2"/>
-          <p:cNvSpPr>
-            <a:spLocks noGrp="1"/>
-          </p:cNvSpPr>
-          <p:nvPr>
-            <p:ph type="body" idx="3" sz="quarter"/>
-          </p:nvPr>
-        </p:nvSpPr>
-        <p:spPr/>
-        <p:txBody>
-          <a:bodyPr/>
-          <a:lstStyle/>
-          <a:p>
-            <a:r>
-              <a:t>Buscar: «correlación no implica causalidad» · «correlaciones espurias ejemplos»</a:t>
-            </a:r>
-          </a:p>
-        </p:txBody>
-      </p:sp>
-      <p:sp>
-        <p:nvSpPr>
-          <p:cNvPr id="4" name="Slide Number Placeholder 3"/>
-          <p:cNvSpPr>
-            <a:spLocks noGrp="1"/>
-          </p:cNvSpPr>
-          <p:nvPr>
-            <p:ph type="sldNum" idx="5" sz="quarter"/>
-          </p:nvPr>
-        </p:nvSpPr>
-        <p:spPr/>
-      </p:sp>
-    </p:spTree>
-  </p:cSld>
-  <p:clrMapOvr>
-    <a:masterClrMapping/>
-  </p:clrMapOvr>
-</p:notes>
 </file>
 
 <file path=ppt/slideLayouts/slideLayout1.xml><?xml version="1.0" encoding="utf-8"?>

--- a/curso/pptx/S40.pptx
+++ b/curso/pptx/S40.pptx
@@ -22,6 +22,7 @@
     <p:sldId id="270" r:id="rId22"/>
     <p:sldId id="271" r:id="rId23"/>
     <p:sldId id="272" r:id="rId24"/>
+    <p:sldId id="273" r:id="rId25"/>
   </p:sldIdLst>
   <p:sldSz cx="12192000" cy="6858000" type="screen4x3"/>
   <p:notesSz cx="6858000" cy="9144000"/>
@@ -3535,7 +3536,7 @@
                 </a:solidFill>
                 <a:latin typeface="Nunito Sans"/>
               </a:rPr>
-              <a:t>PENSAMIENTO CRÍTICO · SESIÓN 40 · UNIDAD 7 · NÚMEROS QUE ENGAÑAN</a:t>
+              <a:t>PENSAMIENTO CRÍTICO · SESIÓN 40 · UNIDAD 7 · EMOCIONES, CONFLICTOS Y DILEMAS</a:t>
             </a:r>
           </a:p>
         </p:txBody>
@@ -3574,7 +3575,7 @@
                 </a:solidFill>
                 <a:latin typeface="Fredoka"/>
               </a:rPr>
-              <a:t>Correlación y causa, con datos</a:t>
+              <a:t>Conflictos en las redes</a:t>
             </a:r>
           </a:p>
         </p:txBody>
@@ -3613,7 +3614,7 @@
                 </a:solidFill>
                 <a:latin typeface="Nunito Sans"/>
               </a:rPr>
-              <a:t>Que dos datos cambien juntos (correlación) no basta para saber que uno causa el otro; si se descartan otras explicaciones, sí puede ser prueba.</a:t>
+              <a:t>En las redes los conflictos crecen más porque no hay cara y todo queda guardado y a la vista; allí también hay derechos y deberes.</a:t>
             </a:r>
           </a:p>
         </p:txBody>
@@ -3717,7 +3718,7 @@
                 </a:solidFill>
                 <a:latin typeface="Fredoka"/>
               </a:rPr>
-              <a:t>Caso 1 · Helados y ahogamientos</a:t>
+              <a:t>Caso 1 · La captura</a:t>
             </a:r>
           </a:p>
         </p:txBody>
@@ -3799,7 +3800,7 @@
                 </a:solidFill>
                 <a:latin typeface="Nunito Sans"/>
               </a:rPr>
-              <a:t>En la tabla, los dos datos suben juntos. ¿Comer helado hace que la gente se ahogue?</a:t>
+              <a:t>Enfadada, una chica escribe en privado a una amiga: «Una compañera es una pesada». La amiga hace una captura y la sube al chat del equipo de balonmano.</a:t>
             </a:r>
           </a:p>
         </p:txBody>
@@ -3847,7 +3848,7 @@
                 </a:solidFill>
                 <a:latin typeface="Nunito Sans"/>
               </a:rPr>
-              <a:t>¿A causa B? No: nadie se ahoga por comer un helado.</a:t>
+              <a:t>La chica escribió en caliente (sesión 38), pero en privado.</a:t>
             </a:r>
           </a:p>
           <a:p>
@@ -3872,7 +3873,7 @@
                 </a:solidFill>
                 <a:latin typeface="Nunito Sans"/>
               </a:rPr>
-              <a:t>¿B causa A? Tampoco: ahogarse no hace vender helados.</a:t>
+              <a:t>La amiga ha roto la privacidad de la chica: el mensaje era para ella sola.</a:t>
             </a:r>
           </a:p>
           <a:p>
@@ -3897,7 +3898,7 @@
                 </a:solidFill>
                 <a:latin typeface="Nunito Sans"/>
               </a:rPr>
-              <a:t>Tercera causa: el calor. Con calor se comen más helados y más gente se baña.</a:t>
+              <a:t>Ahora lo lee toda la clase, incluida la compañera de la que hablaba. Sin cara, sin tono y guardado: el conflicto crece.</a:t>
             </a:r>
           </a:p>
           <a:p>
@@ -3922,7 +3923,7 @@
                 </a:solidFill>
                 <a:latin typeface="Nunito Sans"/>
               </a:rPr>
-              <a:t>Conclusión: hay correlación, pero ninguno causa el otro. La causa común es el calor del verano.</a:t>
+              <a:t>Conclusión: quien reenvía también es responsable. Reenviar no es neutral.</a:t>
             </a:r>
           </a:p>
         </p:txBody>
@@ -4026,7 +4027,7 @@
                 </a:solidFill>
                 <a:latin typeface="Fredoka"/>
               </a:rPr>
-              <a:t>Caso 2 · Móvil y notas</a:t>
+              <a:t>Caso 2 · La cuenta sin nombre</a:t>
             </a:r>
           </a:p>
         </p:txBody>
@@ -4108,7 +4109,7 @@
                 </a:solidFill>
                 <a:latin typeface="Nunito Sans"/>
               </a:rPr>
-              <a:t>Un estudio (inventado) encuentra que los alumnos que usan más el móvil por la noche sacan peores notas.</a:t>
+              <a:t>Una cuenta sin foto ni nombre comenta cada foto de un chico: «Qué pintas», «Nadie te aguanta». Lleva así tres semanas.</a:t>
             </a:r>
           </a:p>
         </p:txBody>
@@ -4156,7 +4157,7 @@
                 </a:solidFill>
                 <a:latin typeface="Nunito Sans"/>
               </a:rPr>
-              <a:t>¿El móvil causa las malas notas? Es posible: quita horas de sueño.</a:t>
+              <a:t>¿Intención de hacer daño? Sí: los comentarios buscan humillar.</a:t>
             </a:r>
           </a:p>
           <a:p>
@@ -4181,7 +4182,7 @@
                 </a:solidFill>
                 <a:latin typeface="Nunito Sans"/>
               </a:rPr>
-              <a:t>¿Al revés? Quien va mal en clase quizá se refugia en el móvil.</a:t>
+              <a:t>¿Repetición? Sí: tres semanas. ¿Desequilibrio? Sí: el chico no sabe quién es.</a:t>
             </a:r>
           </a:p>
           <a:p>
@@ -4206,7 +4207,7 @@
                 </a:solidFill>
                 <a:latin typeface="Nunito Sans"/>
               </a:rPr>
-              <a:t>¿Tercera causa? Estrés o problemas en casa podrían producir las dos cosas.</a:t>
+              <a:t>Es ciberacoso. Ese chico no debe contestar en caliente: guarda capturas, bloquea y lo denuncia.</a:t>
             </a:r>
           </a:p>
           <a:p>
@@ -4231,7 +4232,7 @@
                 </a:solidFill>
                 <a:latin typeface="Nunito Sans"/>
               </a:rPr>
-              <a:t>Conclusión: la correlación es una pista. Para saber la causa hacen falta más estudios.</a:t>
+              <a:t>Conclusión: el ciberacoso no se aguanta solo. Hay que contárselo a un adulto de confianza.</a:t>
             </a:r>
           </a:p>
         </p:txBody>
@@ -4245,315 +4246,6 @@
 </file>
 
 <file path=ppt/slides/slide12.xml><?xml version="1.0" encoding="utf-8"?>
-<p:sld xmlns:a="http://schemas.openxmlformats.org/drawingml/2006/main" xmlns:p="http://schemas.openxmlformats.org/presentationml/2006/main" xmlns:r="http://schemas.openxmlformats.org/officeDocument/2006/relationships">
-  <p:cSld>
-    <p:bg>
-      <p:bgPr>
-        <a:solidFill>
-          <a:srgbClr val="FBF7EF"/>
-        </a:solidFill>
-        <a:effectLst/>
-      </p:bgPr>
-    </p:bg>
-    <p:spTree>
-      <p:nvGrpSpPr>
-        <p:cNvPr id="1" name=""/>
-        <p:cNvGrpSpPr/>
-        <p:nvPr/>
-      </p:nvGrpSpPr>
-      <p:grpSpPr/>
-      <p:sp>
-        <p:nvSpPr>
-          <p:cNvPr id="2" name="TextBox 1"/>
-          <p:cNvSpPr txBox="1"/>
-          <p:nvPr/>
-        </p:nvSpPr>
-        <p:spPr>
-          <a:xfrm>
-            <a:off x="640000" y="380000"/>
-            <a:ext cx="10912000" cy="420000"/>
-          </a:xfrm>
-          <a:prstGeom prst="rect">
-            <a:avLst/>
-          </a:prstGeom>
-          <a:noFill/>
-        </p:spPr>
-        <p:txBody>
-          <a:bodyPr wrap="square">
-            <a:spAutoFit/>
-          </a:bodyPr>
-          <a:lstStyle/>
-          <a:p>
-            <a:pPr>
-              <a:spcAft>
-                <a:spcPts val="630"/>
-              </a:spcAft>
-            </a:pPr>
-            <a:r>
-              <a:rPr sz="1400" b="1">
-                <a:solidFill>
-                  <a:srgbClr val="E8793A"/>
-                </a:solidFill>
-                <a:latin typeface="Nunito Sans"/>
-              </a:rPr>
-              <a:t>BLOQUE 2 · CASOS RESUELTOS</a:t>
-            </a:r>
-          </a:p>
-        </p:txBody>
-      </p:sp>
-      <p:sp>
-        <p:nvSpPr>
-          <p:cNvPr id="3" name="TextBox 2"/>
-          <p:cNvSpPr txBox="1"/>
-          <p:nvPr/>
-        </p:nvSpPr>
-        <p:spPr>
-          <a:xfrm>
-            <a:off x="640000" y="760000"/>
-            <a:ext cx="10912000" cy="800000"/>
-          </a:xfrm>
-          <a:prstGeom prst="rect">
-            <a:avLst/>
-          </a:prstGeom>
-          <a:noFill/>
-        </p:spPr>
-        <p:txBody>
-          <a:bodyPr wrap="square">
-            <a:spAutoFit/>
-          </a:bodyPr>
-          <a:lstStyle/>
-          <a:p>
-            <a:pPr>
-              <a:spcAft>
-                <a:spcPts val="1710"/>
-              </a:spcAft>
-            </a:pPr>
-            <a:r>
-              <a:rPr sz="3800" b="1">
-                <a:solidFill>
-                  <a:srgbClr val="1F2A44"/>
-                </a:solidFill>
-                <a:latin typeface="Fredoka"/>
-              </a:rPr>
-              <a:t>Caso 3 · Pura casualidad</a:t>
-            </a:r>
-          </a:p>
-        </p:txBody>
-      </p:sp>
-      <p:sp>
-        <p:nvSpPr>
-          <p:cNvPr id="4" name="Rectangle 3"/>
-          <p:cNvSpPr/>
-          <p:nvPr/>
-        </p:nvSpPr>
-        <p:spPr>
-          <a:xfrm>
-            <a:off x="640000" y="1600000"/>
-            <a:ext cx="10912000" cy="1100000"/>
-          </a:xfrm>
-          <a:prstGeom prst="rect">
-            <a:avLst/>
-          </a:prstGeom>
-          <a:solidFill>
-            <a:srgbClr val="FFFFFF"/>
-          </a:solidFill>
-          <a:ln>
-            <a:noFill/>
-          </a:ln>
-        </p:spPr>
-        <p:style>
-          <a:lnRef idx="1">
-            <a:schemeClr val="accent1"/>
-          </a:lnRef>
-          <a:fillRef idx="3">
-            <a:schemeClr val="accent1"/>
-          </a:fillRef>
-          <a:effectRef idx="2">
-            <a:schemeClr val="accent1"/>
-          </a:effectRef>
-          <a:fontRef idx="minor">
-            <a:schemeClr val="lt1"/>
-          </a:fontRef>
-        </p:style>
-        <p:txBody>
-          <a:bodyPr rtlCol="0" anchor="ctr"/>
-          <a:lstStyle/>
-          <a:p>
-            <a:pPr algn="ctr"/>
-          </a:p>
-        </p:txBody>
-      </p:sp>
-      <p:sp>
-        <p:nvSpPr>
-          <p:cNvPr id="5" name="TextBox 4"/>
-          <p:cNvSpPr txBox="1"/>
-          <p:nvPr/>
-        </p:nvSpPr>
-        <p:spPr>
-          <a:xfrm>
-            <a:off x="840000" y="1650000"/>
-            <a:ext cx="10512000" cy="1000000"/>
-          </a:xfrm>
-          <a:prstGeom prst="rect">
-            <a:avLst/>
-          </a:prstGeom>
-          <a:noFill/>
-        </p:spPr>
-        <p:txBody>
-          <a:bodyPr wrap="square" anchor="ctr">
-            <a:spAutoFit/>
-          </a:bodyPr>
-          <a:lstStyle/>
-          <a:p>
-            <a:pPr>
-              <a:spcAft>
-                <a:spcPts val="1170"/>
-              </a:spcAft>
-            </a:pPr>
-            <a:r>
-              <a:rPr sz="2600" b="1">
-                <a:solidFill>
-                  <a:srgbClr val="1F2A44"/>
-                </a:solidFill>
-                <a:latin typeface="Nunito Sans"/>
-              </a:rPr>
-              <a:t>La web de Tyler Vigen encontró que en EE. UU., entre 1999 y 2009, los ahogados en piscinas subían y bajaban igual que las películas de Nicolas Cage.</a:t>
-            </a:r>
-          </a:p>
-        </p:txBody>
-      </p:sp>
-      <p:sp>
-        <p:nvSpPr>
-          <p:cNvPr id="6" name="TextBox 5"/>
-          <p:cNvSpPr txBox="1"/>
-          <p:nvPr/>
-        </p:nvSpPr>
-        <p:spPr>
-          <a:xfrm>
-            <a:off x="640000" y="2900000"/>
-            <a:ext cx="10912000" cy="3500000"/>
-          </a:xfrm>
-          <a:prstGeom prst="rect">
-            <a:avLst/>
-          </a:prstGeom>
-          <a:noFill/>
-        </p:spPr>
-        <p:txBody>
-          <a:bodyPr wrap="square">
-            <a:spAutoFit/>
-          </a:bodyPr>
-          <a:lstStyle/>
-          <a:p>
-            <a:pPr>
-              <a:spcAft>
-                <a:spcPts val="1080"/>
-              </a:spcAft>
-            </a:pPr>
-            <a:r>
-              <a:rPr sz="2400" b="1">
-                <a:solidFill>
-                  <a:srgbClr val="E8793A"/>
-                </a:solidFill>
-                <a:latin typeface="Nunito Sans"/>
-              </a:rPr>
-              <a:t>1. </a:t>
-            </a:r>
-            <a:r>
-              <a:rPr sz="2400" b="0">
-                <a:solidFill>
-                  <a:srgbClr val="1F2A44"/>
-                </a:solidFill>
-                <a:latin typeface="Nunito Sans"/>
-              </a:rPr>
-              <a:t>¿Las películas de Nicolas Cage ahogan a la gente? Claro que no.</a:t>
-            </a:r>
-          </a:p>
-          <a:p>
-            <a:pPr>
-              <a:spcAft>
-                <a:spcPts val="1080"/>
-              </a:spcAft>
-            </a:pPr>
-            <a:r>
-              <a:rPr sz="2400" b="1">
-                <a:solidFill>
-                  <a:srgbClr val="E8793A"/>
-                </a:solidFill>
-                <a:latin typeface="Nunito Sans"/>
-              </a:rPr>
-              <a:t>2. </a:t>
-            </a:r>
-            <a:r>
-              <a:rPr sz="2400" b="0">
-                <a:solidFill>
-                  <a:srgbClr val="1F2A44"/>
-                </a:solidFill>
-                <a:latin typeface="Nunito Sans"/>
-              </a:rPr>
-              <a:t>¿Hay una tercera causa? No se ve ninguna.</a:t>
-            </a:r>
-          </a:p>
-          <a:p>
-            <a:pPr>
-              <a:spcAft>
-                <a:spcPts val="1080"/>
-              </a:spcAft>
-            </a:pPr>
-            <a:r>
-              <a:rPr sz="2400" b="1">
-                <a:solidFill>
-                  <a:srgbClr val="E8793A"/>
-                </a:solidFill>
-                <a:latin typeface="Nunito Sans"/>
-              </a:rPr>
-              <a:t>3. </a:t>
-            </a:r>
-            <a:r>
-              <a:rPr sz="2400" b="0">
-                <a:solidFill>
-                  <a:srgbClr val="1F2A44"/>
-                </a:solidFill>
-                <a:latin typeface="Nunito Sans"/>
-              </a:rPr>
-              <a:t>Si comparas miles de datos, algunos coinciden por casualidad.</a:t>
-            </a:r>
-          </a:p>
-          <a:p>
-            <a:pPr>
-              <a:spcAft>
-                <a:spcPts val="1080"/>
-              </a:spcAft>
-            </a:pPr>
-            <a:r>
-              <a:rPr sz="2400" b="1">
-                <a:solidFill>
-                  <a:srgbClr val="E8793A"/>
-                </a:solidFill>
-                <a:latin typeface="Nunito Sans"/>
-              </a:rPr>
-              <a:t>4. </a:t>
-            </a:r>
-            <a:r>
-              <a:rPr sz="2400" b="0">
-                <a:solidFill>
-                  <a:srgbClr val="1F2A44"/>
-                </a:solidFill>
-                <a:latin typeface="Nunito Sans"/>
-              </a:rPr>
-              <a:t>Conclusión: dos líneas que se mueven juntas pueden no tener nada que ver.</a:t>
-            </a:r>
-          </a:p>
-        </p:txBody>
-      </p:sp>
-    </p:spTree>
-  </p:cSld>
-  <p:clrMapOvr>
-    <a:masterClrMapping/>
-  </p:clrMapOvr>
-</p:sld>
-</file>
-
-<file path=ppt/slides/slide13.xml><?xml version="1.0" encoding="utf-8"?>
 <p:sld xmlns:a="http://schemas.openxmlformats.org/drawingml/2006/main" xmlns:p="http://schemas.openxmlformats.org/presentationml/2006/main" xmlns:r="http://schemas.openxmlformats.org/officeDocument/2006/relationships">
   <p:cSld>
     <p:bg>
@@ -4644,7 +4336,7 @@
                 </a:solidFill>
                 <a:latin typeface="Fredoka"/>
               </a:rPr>
-              <a:t>⚠ Tabaco y cáncer</a:t>
+              <a:t>⚠ «Solo era una broma»</a:t>
             </a:r>
           </a:p>
         </p:txBody>
@@ -4726,7 +4418,7 @@
                 </a:solidFill>
                 <a:latin typeface="Nunito Sans"/>
               </a:rPr>
-              <a:t>Los fumadores tienen muchos más casos de cáncer de pulmón que quienes no fuman. Alguien dice: «Correlación no es causa. No está demostrado».</a:t>
+              <a:t>Un chico graba a otro fallando un tiro en el partido, le pone música graciosa y lo sube. Muchos se ríen. El primero dice: «Solo era una broma».</a:t>
             </a:r>
           </a:p>
         </p:txBody>
@@ -4774,7 +4466,7 @@
                 </a:solidFill>
                 <a:latin typeface="Nunito Sans"/>
               </a:rPr>
-              <a:t>¿Tiene razón? ¿No sabemos si el tabaco causa cáncer?</a:t>
+              <a:t>Si lo hizo de broma, ¿no pasa nada?</a:t>
             </a:r>
           </a:p>
           <a:p>
@@ -4799,7 +4491,7 @@
                 </a:solidFill>
                 <a:latin typeface="Nunito Sans"/>
               </a:rPr>
-              <a:t>Es verdad que una correlación sola no basta. Pero aquí no está sola.</a:t>
+              <a:t>Parece que no: no quería hacer daño y la gente se ríe.</a:t>
             </a:r>
           </a:p>
           <a:p>
@@ -4824,7 +4516,7 @@
                 </a:solidFill>
                 <a:latin typeface="Nunito Sans"/>
               </a:rPr>
-              <a:t>Los científicos descartaron otras causas (edad, trabajo…). Y cuanto más fumas, más riesgo; si lo dejas, baja.</a:t>
+              <a:t>Pero ¿se ríe el otro? ¿Dio permiso? Su imagen es suya.</a:t>
             </a:r>
           </a:p>
           <a:p>
@@ -4849,7 +4541,7 @@
                 </a:solidFill>
                 <a:latin typeface="Nunito Sans"/>
               </a:rPr>
-              <a:t>Además, saben cómo pasa: el humo tiene sustancias que dañan las células del pulmón.</a:t>
+              <a:t>Una broma lo es si se ríen todos, también quien sale. Si no, es reírse de alguien.</a:t>
             </a:r>
           </a:p>
           <a:p>
@@ -4874,25 +4566,111 @@
                 </a:solidFill>
                 <a:latin typeface="Nunito Sans"/>
               </a:rPr>
-              <a:t>Conclusión: la correlación sí prueba una causa cuando se </a:t>
-            </a:r>
-            <a:r>
-              <a:rPr sz="2400" b="1">
-                <a:solidFill>
-                  <a:srgbClr val="1F2A44"/>
-                </a:solidFill>
-                <a:latin typeface="Nunito Sans"/>
-              </a:rPr>
-              <a:t>descartan</a:t>
-            </a:r>
-            <a:r>
-              <a:rPr sz="2400" b="0">
-                <a:solidFill>
-                  <a:srgbClr val="1F2A44"/>
-                </a:solidFill>
-                <a:latin typeface="Nunito Sans"/>
-              </a:rPr>
-              <a:t> las otras explicaciones. La frase no es un comodín.</a:t>
+              <a:t>Conclusión: la intención no borra el daño. Sin permiso, subir el vídeo no respeta al otro.</a:t>
+            </a:r>
+          </a:p>
+        </p:txBody>
+      </p:sp>
+    </p:spTree>
+  </p:cSld>
+  <p:clrMapOvr>
+    <a:masterClrMapping/>
+  </p:clrMapOvr>
+</p:sld>
+</file>
+
+<file path=ppt/slides/slide13.xml><?xml version="1.0" encoding="utf-8"?>
+<p:sld xmlns:a="http://schemas.openxmlformats.org/drawingml/2006/main" xmlns:p="http://schemas.openxmlformats.org/presentationml/2006/main" xmlns:r="http://schemas.openxmlformats.org/officeDocument/2006/relationships">
+  <p:cSld>
+    <p:bg>
+      <p:bgPr>
+        <a:solidFill>
+          <a:srgbClr val="1F2A44"/>
+        </a:solidFill>
+        <a:effectLst/>
+      </p:bgPr>
+    </p:bg>
+    <p:spTree>
+      <p:nvGrpSpPr>
+        <p:cNvPr id="1" name=""/>
+        <p:cNvGrpSpPr/>
+        <p:nvPr/>
+      </p:nvGrpSpPr>
+      <p:grpSpPr/>
+      <p:sp>
+        <p:nvSpPr>
+          <p:cNvPr id="2" name="TextBox 1"/>
+          <p:cNvSpPr txBox="1"/>
+          <p:nvPr/>
+        </p:nvSpPr>
+        <p:spPr>
+          <a:xfrm>
+            <a:off x="640000" y="2300000"/>
+            <a:ext cx="10912000" cy="500000"/>
+          </a:xfrm>
+          <a:prstGeom prst="rect">
+            <a:avLst/>
+          </a:prstGeom>
+          <a:noFill/>
+        </p:spPr>
+        <p:txBody>
+          <a:bodyPr wrap="square">
+            <a:spAutoFit/>
+          </a:bodyPr>
+          <a:lstStyle/>
+          <a:p>
+            <a:pPr>
+              <a:spcAft>
+                <a:spcPts val="810"/>
+              </a:spcAft>
+            </a:pPr>
+            <a:r>
+              <a:rPr sz="1800" b="1">
+                <a:solidFill>
+                  <a:srgbClr val="F4B183"/>
+                </a:solidFill>
+                <a:latin typeface="Nunito Sans"/>
+              </a:rPr>
+              <a:t>BLOQUE 3</a:t>
+            </a:r>
+          </a:p>
+        </p:txBody>
+      </p:sp>
+      <p:sp>
+        <p:nvSpPr>
+          <p:cNvPr id="3" name="TextBox 2"/>
+          <p:cNvSpPr txBox="1"/>
+          <p:nvPr/>
+        </p:nvSpPr>
+        <p:spPr>
+          <a:xfrm>
+            <a:off x="640000" y="2800000"/>
+            <a:ext cx="10912000" cy="800000"/>
+          </a:xfrm>
+          <a:prstGeom prst="rect">
+            <a:avLst/>
+          </a:prstGeom>
+          <a:noFill/>
+        </p:spPr>
+        <p:txBody>
+          <a:bodyPr wrap="square">
+            <a:spAutoFit/>
+          </a:bodyPr>
+          <a:lstStyle/>
+          <a:p>
+            <a:pPr>
+              <a:spcAft>
+                <a:spcPts val="2160"/>
+              </a:spcAft>
+            </a:pPr>
+            <a:r>
+              <a:rPr sz="4800" b="1">
+                <a:solidFill>
+                  <a:srgbClr val="FBF7EF"/>
+                </a:solidFill>
+                <a:latin typeface="Fredoka"/>
+              </a:rPr>
+              <a:t>Si te pasa o lo ves</a:t>
             </a:r>
           </a:p>
         </p:txBody>
@@ -4957,7 +4735,7 @@
                 </a:solidFill>
                 <a:latin typeface="Nunito Sans"/>
               </a:rPr>
-              <a:t>LO DE HOY EN TRES LÍNEAS</a:t>
+              <a:t>BLOQUE 3 · SI TE PASA O LO VES</a:t>
             </a:r>
           </a:p>
         </p:txBody>
@@ -4996,7 +4774,7 @@
                 </a:solidFill>
                 <a:latin typeface="Fredoka"/>
               </a:rPr>
-              <a:t>Escríbelo tú primero, sin mirar</a:t>
+              <a:t>Qué hacer ante un conflicto en las redes</a:t>
             </a:r>
           </a:p>
         </p:txBody>
@@ -5009,8 +4787,8 @@
         </p:nvSpPr>
         <p:spPr>
           <a:xfrm>
-            <a:off x="640000" y="1800000"/>
-            <a:ext cx="10912000" cy="1500000"/>
+            <a:off x="640000" y="1650000"/>
+            <a:ext cx="10912000" cy="4808000"/>
           </a:xfrm>
           <a:prstGeom prst="rect">
             <a:avLst/>
@@ -5025,17 +4803,155 @@
           <a:p>
             <a:pPr>
               <a:spcAft>
-                <a:spcPts val="1170"/>
-              </a:spcAft>
-            </a:pPr>
-            <a:r>
-              <a:rPr sz="2600" b="0">
-                <a:solidFill>
-                  <a:srgbClr val="4A5568"/>
-                </a:solidFill>
-                <a:latin typeface="Nunito Sans"/>
-              </a:rPr>
-              <a:t>Dos minutos. Después lo comparamos.</a:t>
+                <a:spcPts val="1260"/>
+              </a:spcAft>
+            </a:pPr>
+            <a:r>
+              <a:rPr sz="2800" b="1">
+                <a:solidFill>
+                  <a:srgbClr val="E8793A"/>
+                </a:solidFill>
+                <a:latin typeface="Nunito Sans"/>
+              </a:rPr>
+              <a:t>• </a:t>
+            </a:r>
+            <a:r>
+              <a:rPr sz="2800" b="1">
+                <a:solidFill>
+                  <a:srgbClr val="1F2A44"/>
+                </a:solidFill>
+                <a:latin typeface="Nunito Sans"/>
+              </a:rPr>
+              <a:t>No contestar en caliente:</a:t>
+            </a:r>
+            <a:r>
+              <a:rPr sz="2800" b="0">
+                <a:solidFill>
+                  <a:srgbClr val="1F2A44"/>
+                </a:solidFill>
+                <a:latin typeface="Nunito Sans"/>
+              </a:rPr>
+              <a:t> nombrar, esperar y preguntar.</a:t>
+            </a:r>
+          </a:p>
+          <a:p>
+            <a:pPr>
+              <a:spcAft>
+                <a:spcPts val="1260"/>
+              </a:spcAft>
+            </a:pPr>
+            <a:r>
+              <a:rPr sz="2800" b="1">
+                <a:solidFill>
+                  <a:srgbClr val="E8793A"/>
+                </a:solidFill>
+                <a:latin typeface="Nunito Sans"/>
+              </a:rPr>
+              <a:t>• </a:t>
+            </a:r>
+            <a:r>
+              <a:rPr sz="2800" b="1">
+                <a:solidFill>
+                  <a:srgbClr val="1F2A44"/>
+                </a:solidFill>
+                <a:latin typeface="Nunito Sans"/>
+              </a:rPr>
+              <a:t>No reenviar:</a:t>
+            </a:r>
+            <a:r>
+              <a:rPr sz="2800" b="0">
+                <a:solidFill>
+                  <a:srgbClr val="1F2A44"/>
+                </a:solidFill>
+                <a:latin typeface="Nunito Sans"/>
+              </a:rPr>
+              <a:t> si no lo difundes, dejas de hacerlo crecer.</a:t>
+            </a:r>
+          </a:p>
+          <a:p>
+            <a:pPr>
+              <a:spcAft>
+                <a:spcPts val="1260"/>
+              </a:spcAft>
+            </a:pPr>
+            <a:r>
+              <a:rPr sz="2800" b="1">
+                <a:solidFill>
+                  <a:srgbClr val="E8793A"/>
+                </a:solidFill>
+                <a:latin typeface="Nunito Sans"/>
+              </a:rPr>
+              <a:t>• </a:t>
+            </a:r>
+            <a:r>
+              <a:rPr sz="2800" b="1">
+                <a:solidFill>
+                  <a:srgbClr val="1F2A44"/>
+                </a:solidFill>
+                <a:latin typeface="Nunito Sans"/>
+              </a:rPr>
+              <a:t>Guardar pruebas,</a:t>
+            </a:r>
+            <a:r>
+              <a:rPr sz="2800" b="0">
+                <a:solidFill>
+                  <a:srgbClr val="1F2A44"/>
+                </a:solidFill>
+                <a:latin typeface="Nunito Sans"/>
+              </a:rPr>
+              <a:t> bloquear y denunciar en la propia aplicación.</a:t>
+            </a:r>
+          </a:p>
+          <a:p>
+            <a:pPr>
+              <a:spcAft>
+                <a:spcPts val="1260"/>
+              </a:spcAft>
+            </a:pPr>
+            <a:r>
+              <a:rPr sz="2800" b="1">
+                <a:solidFill>
+                  <a:srgbClr val="E8793A"/>
+                </a:solidFill>
+                <a:latin typeface="Nunito Sans"/>
+              </a:rPr>
+              <a:t>• </a:t>
+            </a:r>
+            <a:r>
+              <a:rPr sz="2800" b="1">
+                <a:solidFill>
+                  <a:srgbClr val="1F2A44"/>
+                </a:solidFill>
+                <a:latin typeface="Nunito Sans"/>
+              </a:rPr>
+              <a:t>Contarlo</a:t>
+            </a:r>
+            <a:r>
+              <a:rPr sz="2800" b="0">
+                <a:solidFill>
+                  <a:srgbClr val="1F2A44"/>
+                </a:solidFill>
+                <a:latin typeface="Nunito Sans"/>
+              </a:rPr>
+              <a:t> a un adulto de confianza. También existe el teléfono </a:t>
+            </a:r>
+            <a:r>
+              <a:rPr sz="2800" b="1">
+                <a:solidFill>
+                  <a:srgbClr val="1F2A44"/>
+                </a:solidFill>
+                <a:latin typeface="Nunito Sans"/>
+              </a:rPr>
+              <a:t>017</a:t>
+            </a:r>
+            <a:r>
+              <a:rPr sz="2800" b="0">
+                <a:solidFill>
+                  <a:srgbClr val="1F2A44"/>
+                </a:solidFill>
+                <a:latin typeface="Nunito Sans"/>
+              </a:rPr>
+              <a:t> (INCIBE), gratuito.</a:t>
             </a:r>
           </a:p>
         </p:txBody>
@@ -5113,8 +5029,8 @@
         </p:nvSpPr>
         <p:spPr>
           <a:xfrm>
-            <a:off x="640000" y="1300000"/>
-            <a:ext cx="10912000" cy="4800000"/>
+            <a:off x="640000" y="760000"/>
+            <a:ext cx="10912000" cy="800000"/>
           </a:xfrm>
           <a:prstGeom prst="rect">
             <a:avLst/>
@@ -5129,76 +5045,56 @@
           <a:p>
             <a:pPr>
               <a:spcAft>
-                <a:spcPts val="1350"/>
-              </a:spcAft>
-            </a:pPr>
-            <a:r>
-              <a:rPr sz="3000" b="1">
-                <a:solidFill>
-                  <a:srgbClr val="E8793A"/>
-                </a:solidFill>
-                <a:latin typeface="Nunito Sans"/>
-              </a:rPr>
-              <a:t>1. </a:t>
-            </a:r>
-            <a:r>
-              <a:rPr sz="3000" b="0">
+                <a:spcPts val="1710"/>
+              </a:spcAft>
+            </a:pPr>
+            <a:r>
+              <a:rPr sz="3800" b="1">
                 <a:solidFill>
                   <a:srgbClr val="1F2A44"/>
                 </a:solidFill>
-                <a:latin typeface="Nunito Sans"/>
-              </a:rPr>
-              <a:t>Hay correlación cuando dos datos cambian juntos.</a:t>
-            </a:r>
-          </a:p>
-          <a:p>
-            <a:pPr>
-              <a:spcAft>
-                <a:spcPts val="1350"/>
-              </a:spcAft>
-            </a:pPr>
-            <a:r>
-              <a:rPr sz="3000" b="1">
-                <a:solidFill>
-                  <a:srgbClr val="E8793A"/>
-                </a:solidFill>
-                <a:latin typeface="Nunito Sans"/>
-              </a:rPr>
-              <a:t>2. </a:t>
-            </a:r>
-            <a:r>
-              <a:rPr sz="3000" b="0">
-                <a:solidFill>
-                  <a:srgbClr val="1F2A44"/>
-                </a:solidFill>
-                <a:latin typeface="Nunito Sans"/>
-              </a:rPr>
-              <a:t>Una correlación sola no prueba la causa: puede ser al revés, una tercera causa o casualidad.</a:t>
-            </a:r>
-          </a:p>
-          <a:p>
-            <a:pPr>
-              <a:spcAft>
-                <a:spcPts val="1350"/>
-              </a:spcAft>
-            </a:pPr>
-            <a:r>
-              <a:rPr sz="3000" b="1">
-                <a:solidFill>
-                  <a:srgbClr val="E8793A"/>
-                </a:solidFill>
-                <a:latin typeface="Nunito Sans"/>
-              </a:rPr>
-              <a:t>3. </a:t>
-            </a:r>
-            <a:r>
-              <a:rPr sz="3000" b="0">
-                <a:solidFill>
-                  <a:srgbClr val="1F2A44"/>
-                </a:solidFill>
-                <a:latin typeface="Nunito Sans"/>
-              </a:rPr>
-              <a:t>Si se descartan las otras explicaciones, la correlación sí puede probar una causa.</a:t>
+                <a:latin typeface="Fredoka"/>
+              </a:rPr>
+              <a:t>Escríbelo tú primero, sin mirar</a:t>
+            </a:r>
+          </a:p>
+        </p:txBody>
+      </p:sp>
+      <p:sp>
+        <p:nvSpPr>
+          <p:cNvPr id="4" name="TextBox 3"/>
+          <p:cNvSpPr txBox="1"/>
+          <p:nvPr/>
+        </p:nvSpPr>
+        <p:spPr>
+          <a:xfrm>
+            <a:off x="640000" y="1800000"/>
+            <a:ext cx="10912000" cy="1500000"/>
+          </a:xfrm>
+          <a:prstGeom prst="rect">
+            <a:avLst/>
+          </a:prstGeom>
+          <a:noFill/>
+        </p:spPr>
+        <p:txBody>
+          <a:bodyPr wrap="square">
+            <a:spAutoFit/>
+          </a:bodyPr>
+          <a:lstStyle/>
+          <a:p>
+            <a:pPr>
+              <a:spcAft>
+                <a:spcPts val="1170"/>
+              </a:spcAft>
+            </a:pPr>
+            <a:r>
+              <a:rPr sz="2600" b="0">
+                <a:solidFill>
+                  <a:srgbClr val="4A5568"/>
+                </a:solidFill>
+                <a:latin typeface="Nunito Sans"/>
+              </a:rPr>
+              <a:t>Dos minutos. Después lo comparamos.</a:t>
             </a:r>
           </a:p>
         </p:txBody>
@@ -5217,7 +5113,7 @@
     <p:bg>
       <p:bgPr>
         <a:solidFill>
-          <a:srgbClr val="1F2A44"/>
+          <a:srgbClr val="FBF7EF"/>
         </a:solidFill>
         <a:effectLst/>
       </p:bgPr>
@@ -5259,11 +5155,11 @@
             <a:r>
               <a:rPr sz="1400" b="1">
                 <a:solidFill>
-                  <a:srgbClr val="F4B183"/>
-                </a:solidFill>
-                <a:latin typeface="Nunito Sans"/>
-              </a:rPr>
-              <a:t>VÍDEO</a:t>
+                  <a:srgbClr val="E8793A"/>
+                </a:solidFill>
+                <a:latin typeface="Nunito Sans"/>
+              </a:rPr>
+              <a:t>LO DE HOY EN TRES LÍNEAS</a:t>
             </a:r>
           </a:p>
         </p:txBody>
@@ -5276,8 +5172,8 @@
         </p:nvSpPr>
         <p:spPr>
           <a:xfrm>
-            <a:off x="640000" y="760000"/>
-            <a:ext cx="10912000" cy="800000"/>
+            <a:off x="640000" y="1300000"/>
+            <a:ext cx="10912000" cy="4800000"/>
           </a:xfrm>
           <a:prstGeom prst="rect">
             <a:avLst/>
@@ -5292,56 +5188,76 @@
           <a:p>
             <a:pPr>
               <a:spcAft>
-                <a:spcPts val="1620"/>
-              </a:spcAft>
-            </a:pPr>
-            <a:r>
-              <a:rPr sz="3600" b="1">
-                <a:solidFill>
-                  <a:srgbClr val="FBF7EF"/>
-                </a:solidFill>
-                <a:latin typeface="Fredoka"/>
-              </a:rPr>
-              <a:t>Correlación no implica causalidad</a:t>
-            </a:r>
-          </a:p>
-        </p:txBody>
-      </p:sp>
-      <p:sp>
-        <p:nvSpPr>
-          <p:cNvPr id="4" name="TextBox 3"/>
-          <p:cNvSpPr txBox="1"/>
-          <p:nvPr/>
-        </p:nvSpPr>
-        <p:spPr>
-          <a:xfrm>
-            <a:off x="640000" y="2200000"/>
-            <a:ext cx="10912000" cy="2000000"/>
-          </a:xfrm>
-          <a:prstGeom prst="rect">
-            <a:avLst/>
-          </a:prstGeom>
-          <a:noFill/>
-        </p:spPr>
-        <p:txBody>
-          <a:bodyPr wrap="square">
-            <a:spAutoFit/>
-          </a:bodyPr>
-          <a:lstStyle/>
-          <a:p>
-            <a:pPr>
-              <a:spcAft>
-                <a:spcPts val="1080"/>
-              </a:spcAft>
-            </a:pPr>
-            <a:r>
-              <a:rPr sz="2400" b="0">
-                <a:solidFill>
-                  <a:srgbClr val="C9D3E6"/>
-                </a:solidFill>
-                <a:latin typeface="Nunito Sans"/>
-              </a:rPr>
-              <a:t>Ver más correlaciones absurdas y reírse un poco, sin perder la idea.</a:t>
+                <a:spcPts val="1350"/>
+              </a:spcAft>
+            </a:pPr>
+            <a:r>
+              <a:rPr sz="3000" b="1">
+                <a:solidFill>
+                  <a:srgbClr val="E8793A"/>
+                </a:solidFill>
+                <a:latin typeface="Nunito Sans"/>
+              </a:rPr>
+              <a:t>1. </a:t>
+            </a:r>
+            <a:r>
+              <a:rPr sz="3000" b="0">
+                <a:solidFill>
+                  <a:srgbClr val="1F2A44"/>
+                </a:solidFill>
+                <a:latin typeface="Nunito Sans"/>
+              </a:rPr>
+              <a:t>En las redes los conflictos crecen: sin cara, anonimato, todo queda guardado y lo ve mucha gente.</a:t>
+            </a:r>
+          </a:p>
+          <a:p>
+            <a:pPr>
+              <a:spcAft>
+                <a:spcPts val="1350"/>
+              </a:spcAft>
+            </a:pPr>
+            <a:r>
+              <a:rPr sz="3000" b="1">
+                <a:solidFill>
+                  <a:srgbClr val="E8793A"/>
+                </a:solidFill>
+                <a:latin typeface="Nunito Sans"/>
+              </a:rPr>
+              <a:t>2. </a:t>
+            </a:r>
+            <a:r>
+              <a:rPr sz="3000" b="0">
+                <a:solidFill>
+                  <a:srgbClr val="1F2A44"/>
+                </a:solidFill>
+                <a:latin typeface="Nunito Sans"/>
+              </a:rPr>
+              <a:t>El ciberacoso es hacer daño a propósito y de forma repetida con la tecnología.</a:t>
+            </a:r>
+          </a:p>
+          <a:p>
+            <a:pPr>
+              <a:spcAft>
+                <a:spcPts val="1350"/>
+              </a:spcAft>
+            </a:pPr>
+            <a:r>
+              <a:rPr sz="3000" b="1">
+                <a:solidFill>
+                  <a:srgbClr val="E8793A"/>
+                </a:solidFill>
+                <a:latin typeface="Nunito Sans"/>
+              </a:rPr>
+              <a:t>3. </a:t>
+            </a:r>
+            <a:r>
+              <a:rPr sz="3000" b="0">
+                <a:solidFill>
+                  <a:srgbClr val="1F2A44"/>
+                </a:solidFill>
+                <a:latin typeface="Nunito Sans"/>
+              </a:rPr>
+              <a:t>Tu imagen y tus mensajes privados son tuyos; los de los demás, también.</a:t>
             </a:r>
           </a:p>
         </p:txBody>
@@ -5406,6 +5322,149 @@
                 </a:solidFill>
                 <a:latin typeface="Nunito Sans"/>
               </a:rPr>
+              <a:t>VÍDEO</a:t>
+            </a:r>
+          </a:p>
+        </p:txBody>
+      </p:sp>
+      <p:sp>
+        <p:nvSpPr>
+          <p:cNvPr id="3" name="TextBox 2"/>
+          <p:cNvSpPr txBox="1"/>
+          <p:nvPr/>
+        </p:nvSpPr>
+        <p:spPr>
+          <a:xfrm>
+            <a:off x="640000" y="760000"/>
+            <a:ext cx="10912000" cy="800000"/>
+          </a:xfrm>
+          <a:prstGeom prst="rect">
+            <a:avLst/>
+          </a:prstGeom>
+          <a:noFill/>
+        </p:spPr>
+        <p:txBody>
+          <a:bodyPr wrap="square">
+            <a:spAutoFit/>
+          </a:bodyPr>
+          <a:lstStyle/>
+          <a:p>
+            <a:pPr>
+              <a:spcAft>
+                <a:spcPts val="1620"/>
+              </a:spcAft>
+            </a:pPr>
+            <a:r>
+              <a:rPr sz="3600" b="1">
+                <a:solidFill>
+                  <a:srgbClr val="FBF7EF"/>
+                </a:solidFill>
+                <a:latin typeface="Fredoka"/>
+              </a:rPr>
+              <a:t>Qué es el ciberacoso y qué hacer si lo sufres o lo ves</a:t>
+            </a:r>
+          </a:p>
+        </p:txBody>
+      </p:sp>
+      <p:sp>
+        <p:nvSpPr>
+          <p:cNvPr id="4" name="TextBox 3"/>
+          <p:cNvSpPr txBox="1"/>
+          <p:nvPr/>
+        </p:nvSpPr>
+        <p:spPr>
+          <a:xfrm>
+            <a:off x="640000" y="2200000"/>
+            <a:ext cx="10912000" cy="2000000"/>
+          </a:xfrm>
+          <a:prstGeom prst="rect">
+            <a:avLst/>
+          </a:prstGeom>
+          <a:noFill/>
+        </p:spPr>
+        <p:txBody>
+          <a:bodyPr wrap="square">
+            <a:spAutoFit/>
+          </a:bodyPr>
+          <a:lstStyle/>
+          <a:p>
+            <a:pPr>
+              <a:spcAft>
+                <a:spcPts val="1080"/>
+              </a:spcAft>
+            </a:pPr>
+            <a:r>
+              <a:rPr sz="2400" b="0">
+                <a:solidFill>
+                  <a:srgbClr val="C9D3E6"/>
+                </a:solidFill>
+                <a:latin typeface="Nunito Sans"/>
+              </a:rPr>
+              <a:t>Que vean casos distintos a los de clase y sepan a quién pedir ayuda.</a:t>
+            </a:r>
+          </a:p>
+        </p:txBody>
+      </p:sp>
+    </p:spTree>
+  </p:cSld>
+  <p:clrMapOvr>
+    <a:masterClrMapping/>
+  </p:clrMapOvr>
+</p:sld>
+</file>
+
+<file path=ppt/slides/slide18.xml><?xml version="1.0" encoding="utf-8"?>
+<p:sld xmlns:a="http://schemas.openxmlformats.org/drawingml/2006/main" xmlns:p="http://schemas.openxmlformats.org/presentationml/2006/main" xmlns:r="http://schemas.openxmlformats.org/officeDocument/2006/relationships">
+  <p:cSld>
+    <p:bg>
+      <p:bgPr>
+        <a:solidFill>
+          <a:srgbClr val="1F2A44"/>
+        </a:solidFill>
+        <a:effectLst/>
+      </p:bgPr>
+    </p:bg>
+    <p:spTree>
+      <p:nvGrpSpPr>
+        <p:cNvPr id="1" name=""/>
+        <p:cNvGrpSpPr/>
+        <p:nvPr/>
+      </p:nvGrpSpPr>
+      <p:grpSpPr/>
+      <p:sp>
+        <p:nvSpPr>
+          <p:cNvPr id="2" name="TextBox 1"/>
+          <p:cNvSpPr txBox="1"/>
+          <p:nvPr/>
+        </p:nvSpPr>
+        <p:spPr>
+          <a:xfrm>
+            <a:off x="640000" y="380000"/>
+            <a:ext cx="10912000" cy="420000"/>
+          </a:xfrm>
+          <a:prstGeom prst="rect">
+            <a:avLst/>
+          </a:prstGeom>
+          <a:noFill/>
+        </p:spPr>
+        <p:txBody>
+          <a:bodyPr wrap="square">
+            <a:spAutoFit/>
+          </a:bodyPr>
+          <a:lstStyle/>
+          <a:p>
+            <a:pPr>
+              <a:spcAft>
+                <a:spcPts val="630"/>
+              </a:spcAft>
+            </a:pPr>
+            <a:r>
+              <a:rPr sz="1400" b="1">
+                <a:solidFill>
+                  <a:srgbClr val="F4B183"/>
+                </a:solidFill>
+                <a:latin typeface="Nunito Sans"/>
+              </a:rPr>
               <a:t>AHORA, LA HOJA DEL DÍA</a:t>
             </a:r>
           </a:p>
@@ -5999,7 +6058,7 @@
                 </a:solidFill>
                 <a:latin typeface="Nunito Sans"/>
               </a:rPr>
-              <a:t>Una encuesta es como probar una ______ para saber cómo está la sopa.  (sesión 39)</a:t>
+              <a:t>Para descubrir el interés de alguien se pregunta: «¿Para ______ lo quieres?».  (sesión 39)</a:t>
             </a:r>
           </a:p>
           <a:p>
@@ -6024,7 +6083,7 @@
                 </a:solidFill>
                 <a:latin typeface="Nunito Sans"/>
               </a:rPr>
-              <a:t>Elegir al ______ es elegir por sorteo, sin escoger a quién.  (sesión 39)</a:t>
+              <a:t>El conflicto es normal; la ______ es una mala forma de afrontarlo.  (sesión 39)</a:t>
             </a:r>
           </a:p>
           <a:p>
@@ -6049,7 +6108,7 @@
                 </a:solidFill>
                 <a:latin typeface="Nunito Sans"/>
               </a:rPr>
-              <a:t>Si una imagen te da mucha emoción, ______.  (sesión 35)</a:t>
+              <a:t>La lectura lateral es como trabajan los ______ profesionales.  (sesión 35)</a:t>
             </a:r>
           </a:p>
         </p:txBody>
@@ -6201,7 +6260,7 @@
                 </a:solidFill>
                 <a:latin typeface="Nunito Sans"/>
               </a:rPr>
-              <a:t>Una encuesta es como probar una </a:t>
+              <a:t>Para descubrir el interés de alguien se pregunta: «¿Para </a:t>
             </a:r>
             <a:r>
               <a:rPr sz="2600" b="1">
@@ -6210,7 +6269,7 @@
                 </a:solidFill>
                 <a:latin typeface="Nunito Sans"/>
               </a:rPr>
-              <a:t>cucharada</a:t>
+              <a:t>qué</a:t>
             </a:r>
             <a:r>
               <a:rPr sz="2600" b="0">
@@ -6219,7 +6278,7 @@
                 </a:solidFill>
                 <a:latin typeface="Nunito Sans"/>
               </a:rPr>
-              <a:t> para saber cómo está la sopa.  (sesión 39)</a:t>
+              <a:t> lo quieres?».  (sesión 39)</a:t>
             </a:r>
           </a:p>
           <a:p>
@@ -6244,7 +6303,7 @@
                 </a:solidFill>
                 <a:latin typeface="Nunito Sans"/>
               </a:rPr>
-              <a:t>Elegir al </a:t>
+              <a:t>El conflicto es normal; la </a:t>
             </a:r>
             <a:r>
               <a:rPr sz="2600" b="1">
@@ -6253,7 +6312,7 @@
                 </a:solidFill>
                 <a:latin typeface="Nunito Sans"/>
               </a:rPr>
-              <a:t>azar</a:t>
+              <a:t>pelea</a:t>
             </a:r>
             <a:r>
               <a:rPr sz="2600" b="0">
@@ -6262,7 +6321,7 @@
                 </a:solidFill>
                 <a:latin typeface="Nunito Sans"/>
               </a:rPr>
-              <a:t> es elegir por sorteo, sin escoger a quién.  (sesión 39)</a:t>
+              <a:t> es una mala forma de afrontarlo.  (sesión 39)</a:t>
             </a:r>
           </a:p>
           <a:p>
@@ -6287,7 +6346,7 @@
                 </a:solidFill>
                 <a:latin typeface="Nunito Sans"/>
               </a:rPr>
-              <a:t>Si una imagen te da mucha emoción, </a:t>
+              <a:t>La lectura lateral es como trabajan los </a:t>
             </a:r>
             <a:r>
               <a:rPr sz="2600" b="1">
@@ -6296,7 +6355,7 @@
                 </a:solidFill>
                 <a:latin typeface="Nunito Sans"/>
               </a:rPr>
-              <a:t>sospecha</a:t>
+              <a:t>verificadores</a:t>
             </a:r>
             <a:r>
               <a:rPr sz="2600" b="0">
@@ -6305,7 +6364,7 @@
                 </a:solidFill>
                 <a:latin typeface="Nunito Sans"/>
               </a:rPr>
-              <a:t>.  (sesión 35)</a:t>
+              <a:t> profesionales.  (sesión 35)</a:t>
             </a:r>
           </a:p>
         </p:txBody>
@@ -6452,7 +6511,7 @@
                 </a:solidFill>
                 <a:latin typeface="Nunito Sans"/>
               </a:rPr>
-              <a:t>En verano se venden más helados. En verano también hay más personas ahogadas.</a:t>
+              <a:t>Alguien hace una captura de un audio privado de una chica y la sube al chat del equipo de balonmano. En diez minutos la han visto sesenta personas.</a:t>
             </a:r>
           </a:p>
         </p:txBody>
@@ -6491,7 +6550,7 @@
                 </a:solidFill>
                 <a:latin typeface="Nunito Sans"/>
               </a:rPr>
-              <a:t>¿Los helados provocan ahogamientos?</a:t>
+              <a:t>¿Por qué esto hace más daño que si se lo hubiera dicho a una sola persona?</a:t>
             </a:r>
           </a:p>
         </p:txBody>
@@ -6595,7 +6654,7 @@
                 </a:solidFill>
                 <a:latin typeface="Fredoka"/>
               </a:rPr>
-              <a:t>Correlación no es causa</a:t>
+              <a:t>Por qué en las redes se escala más</a:t>
             </a:r>
           </a:p>
         </p:txBody>
@@ -6660,7 +6719,7 @@
                 </a:solidFill>
                 <a:latin typeface="Nunito Sans"/>
               </a:rPr>
-              <a:t>BLOQUE 1 · CORRELACIÓN NO ES CAUSA</a:t>
+              <a:t>BLOQUE 1 · POR QUÉ EN LAS REDES SE ESCALA MÁS</a:t>
             </a:r>
           </a:p>
         </p:txBody>
@@ -6699,57 +6758,14 @@
                 </a:solidFill>
                 <a:latin typeface="Fredoka"/>
               </a:rPr>
-              <a:t>Correlación</a:t>
-            </a:r>
-          </a:p>
-        </p:txBody>
-      </p:sp>
-      <p:sp>
-        <p:nvSpPr>
-          <p:cNvPr id="4" name="Rectangle 3"/>
-          <p:cNvSpPr/>
-          <p:nvPr/>
-        </p:nvSpPr>
-        <p:spPr>
-          <a:xfrm>
-            <a:off x="640000" y="1650000"/>
-            <a:ext cx="10912000" cy="1150000"/>
-          </a:xfrm>
-          <a:prstGeom prst="rect">
-            <a:avLst/>
-          </a:prstGeom>
-          <a:solidFill>
-            <a:srgbClr val="EAF0F7"/>
-          </a:solidFill>
-          <a:ln>
-            <a:noFill/>
-          </a:ln>
-        </p:spPr>
-        <p:style>
-          <a:lnRef idx="1">
-            <a:schemeClr val="accent1"/>
-          </a:lnRef>
-          <a:fillRef idx="3">
-            <a:schemeClr val="accent1"/>
-          </a:fillRef>
-          <a:effectRef idx="2">
-            <a:schemeClr val="accent1"/>
-          </a:effectRef>
-          <a:fontRef idx="minor">
-            <a:schemeClr val="lt1"/>
-          </a:fontRef>
-        </p:style>
-        <p:txBody>
-          <a:bodyPr rtlCol="0" anchor="ctr"/>
-          <a:lstStyle/>
-          <a:p>
-            <a:pPr algn="ctr"/>
-          </a:p>
-        </p:txBody>
-      </p:sp>
-      <p:sp>
-        <p:nvSpPr>
-          <p:cNvPr id="5" name="TextBox 4"/>
+              <a:t>Cuatro razones por las que un conflicto crece en las redes</a:t>
+            </a:r>
+          </a:p>
+        </p:txBody>
+      </p:sp>
+      <p:sp>
+        <p:nvSpPr>
+          <p:cNvPr id="4" name="TextBox 3"/>
           <p:cNvSpPr txBox="1"/>
           <p:nvPr/>
         </p:nvSpPr>
@@ -6771,24 +6787,24 @@
           <a:p>
             <a:pPr>
               <a:spcAft>
-                <a:spcPts val="1260"/>
-              </a:spcAft>
-            </a:pPr>
-            <a:r>
-              <a:rPr sz="2800" b="1">
+                <a:spcPts val="1080"/>
+              </a:spcAft>
+            </a:pPr>
+            <a:r>
+              <a:rPr sz="2400" b="0">
                 <a:solidFill>
                   <a:srgbClr val="1F2A44"/>
                 </a:solidFill>
                 <a:latin typeface="Nunito Sans"/>
               </a:rPr>
-              <a:t>Hay correlación cuando dos datos cambian juntos: cuando uno sube, el otro también sube (o baja).</a:t>
-            </a:r>
-          </a:p>
-        </p:txBody>
-      </p:sp>
-      <p:sp>
-        <p:nvSpPr>
-          <p:cNvPr id="6" name="TextBox 5"/>
+              <a:t>Escalar = hacerse cada vez más grande.</a:t>
+            </a:r>
+          </a:p>
+        </p:txBody>
+      </p:sp>
+      <p:sp>
+        <p:nvSpPr>
+          <p:cNvPr id="5" name="TextBox 4"/>
           <p:cNvSpPr txBox="1"/>
           <p:nvPr/>
         </p:nvSpPr>
@@ -6829,7 +6845,7 @@
                 </a:solidFill>
                 <a:latin typeface="Nunito Sans"/>
               </a:rPr>
-              <a:t>Causa:</a:t>
+              <a:t>Sin cara:</a:t>
             </a:r>
             <a:r>
               <a:rPr sz="2800" b="0">
@@ -6838,16 +6854,32 @@
                 </a:solidFill>
                 <a:latin typeface="Nunito Sans"/>
               </a:rPr>
-              <a:t> una cosa </a:t>
-            </a:r>
+              <a:t> no ves si el otro se ríe o llora. Falta el tono.</a:t>
+            </a:r>
+          </a:p>
+          <a:p>
+            <a:pPr>
+              <a:spcAft>
+                <a:spcPts val="1260"/>
+              </a:spcAft>
+            </a:pPr>
             <a:r>
               <a:rPr sz="2800" b="1">
                 <a:solidFill>
+                  <a:srgbClr val="E8793A"/>
+                </a:solidFill>
+                <a:latin typeface="Nunito Sans"/>
+              </a:rPr>
+              <a:t>• </a:t>
+            </a:r>
+            <a:r>
+              <a:rPr sz="2800" b="1">
+                <a:solidFill>
                   <a:srgbClr val="1F2A44"/>
                 </a:solidFill>
                 <a:latin typeface="Nunito Sans"/>
               </a:rPr>
-              <a:t>produce</a:t>
+              <a:t>Anonimato:</a:t>
             </a:r>
             <a:r>
               <a:rPr sz="2800" b="0">
@@ -6856,7 +6888,7 @@
                 </a:solidFill>
                 <a:latin typeface="Nunito Sans"/>
               </a:rPr>
-              <a:t> la otra</a:t>
+              <a:t> detrás de una cuenta falsa, algunos se atreven a más.</a:t>
             </a:r>
           </a:p>
           <a:p>
@@ -6875,13 +6907,22 @@
               <a:t>• </a:t>
             </a:r>
             <a:r>
+              <a:rPr sz="2800" b="1">
+                <a:solidFill>
+                  <a:srgbClr val="1F2A44"/>
+                </a:solidFill>
+                <a:latin typeface="Nunito Sans"/>
+              </a:rPr>
+              <a:t>Captura:</a:t>
+            </a:r>
+            <a:r>
               <a:rPr sz="2800" b="0">
                 <a:solidFill>
                   <a:srgbClr val="1F2A44"/>
                 </a:solidFill>
                 <a:latin typeface="Nunito Sans"/>
               </a:rPr>
-              <a:t>Sola, la correlación es una pista, no una prueba</a:t>
+              <a:t> todo queda guardado y se puede reenviar, recortar o sacar de contexto.</a:t>
             </a:r>
           </a:p>
           <a:p>
@@ -6900,13 +6941,22 @@
               <a:t>• </a:t>
             </a:r>
             <a:r>
+              <a:rPr sz="2800" b="1">
+                <a:solidFill>
+                  <a:srgbClr val="1F2A44"/>
+                </a:solidFill>
+                <a:latin typeface="Nunito Sans"/>
+              </a:rPr>
+              <a:t>Público:</a:t>
+            </a:r>
+            <a:r>
               <a:rPr sz="2800" b="0">
                 <a:solidFill>
                   <a:srgbClr val="1F2A44"/>
                 </a:solidFill>
                 <a:latin typeface="Nunito Sans"/>
               </a:rPr>
-              <a:t>Sesión 22: «después de» no es «por culpa de»</a:t>
+              <a:t> lo ve mucha gente, y cada «me gusta» anima a seguir.</a:t>
             </a:r>
           </a:p>
         </p:txBody>
@@ -6971,7 +7021,7 @@
                 </a:solidFill>
                 <a:latin typeface="Nunito Sans"/>
               </a:rPr>
-              <a:t>BLOQUE 1 · CORRELACIÓN NO ES CAUSA</a:t>
+              <a:t>BLOQUE 1 · POR QUÉ EN LAS REDES SE ESCALA MÁS</a:t>
             </a:r>
           </a:p>
         </p:txBody>
@@ -7010,14 +7060,57 @@
                 </a:solidFill>
                 <a:latin typeface="Fredoka"/>
               </a:rPr>
-              <a:t>Cuatro explicaciones posibles</a:t>
-            </a:r>
-          </a:p>
-        </p:txBody>
-      </p:sp>
-      <p:sp>
-        <p:nvSpPr>
-          <p:cNvPr id="4" name="TextBox 3"/>
+              <a:t>Ciberacoso</a:t>
+            </a:r>
+          </a:p>
+        </p:txBody>
+      </p:sp>
+      <p:sp>
+        <p:nvSpPr>
+          <p:cNvPr id="4" name="Rectangle 3"/>
+          <p:cNvSpPr/>
+          <p:nvPr/>
+        </p:nvSpPr>
+        <p:spPr>
+          <a:xfrm>
+            <a:off x="640000" y="1650000"/>
+            <a:ext cx="10912000" cy="1150000"/>
+          </a:xfrm>
+          <a:prstGeom prst="rect">
+            <a:avLst/>
+          </a:prstGeom>
+          <a:solidFill>
+            <a:srgbClr val="EAF0F7"/>
+          </a:solidFill>
+          <a:ln>
+            <a:noFill/>
+          </a:ln>
+        </p:spPr>
+        <p:style>
+          <a:lnRef idx="1">
+            <a:schemeClr val="accent1"/>
+          </a:lnRef>
+          <a:fillRef idx="3">
+            <a:schemeClr val="accent1"/>
+          </a:fillRef>
+          <a:effectRef idx="2">
+            <a:schemeClr val="accent1"/>
+          </a:effectRef>
+          <a:fontRef idx="minor">
+            <a:schemeClr val="lt1"/>
+          </a:fontRef>
+        </p:style>
+        <p:txBody>
+          <a:bodyPr rtlCol="0" anchor="ctr"/>
+          <a:lstStyle/>
+          <a:p>
+            <a:pPr algn="ctr"/>
+          </a:p>
+        </p:txBody>
+      </p:sp>
+      <p:sp>
+        <p:nvSpPr>
+          <p:cNvPr id="5" name="TextBox 4"/>
           <p:cNvSpPr txBox="1"/>
           <p:nvPr/>
         </p:nvSpPr>
@@ -7039,24 +7132,24 @@
           <a:p>
             <a:pPr>
               <a:spcAft>
-                <a:spcPts val="1080"/>
-              </a:spcAft>
-            </a:pPr>
-            <a:r>
-              <a:rPr sz="2400" b="0">
+                <a:spcPts val="1260"/>
+              </a:spcAft>
+            </a:pPr>
+            <a:r>
+              <a:rPr sz="2800" b="1">
                 <a:solidFill>
                   <a:srgbClr val="1F2A44"/>
                 </a:solidFill>
                 <a:latin typeface="Nunito Sans"/>
               </a:rPr>
-              <a:t>Si A y B suben juntas, puede ser que…</a:t>
-            </a:r>
-          </a:p>
-        </p:txBody>
-      </p:sp>
-      <p:sp>
-        <p:nvSpPr>
-          <p:cNvPr id="5" name="TextBox 4"/>
+              <a:t>Es hacer daño a alguien a propósito y de forma repetida usando el móvil, las redes o los videojuegos.</a:t>
+            </a:r>
+          </a:p>
+        </p:txBody>
+      </p:sp>
+      <p:sp>
+        <p:nvSpPr>
+          <p:cNvPr id="6" name="TextBox 5"/>
           <p:cNvSpPr txBox="1"/>
           <p:nvPr/>
         </p:nvSpPr>
@@ -7097,7 +7190,7 @@
                 </a:solidFill>
                 <a:latin typeface="Nunito Sans"/>
               </a:rPr>
-              <a:t>A causa B</a:t>
+              <a:t>Intención</a:t>
             </a:r>
             <a:r>
               <a:rPr sz="2800" b="0">
@@ -7106,7 +7199,7 @@
                 </a:solidFill>
                 <a:latin typeface="Nunito Sans"/>
               </a:rPr>
-              <a:t> (a veces es verdad)</a:t>
+              <a:t> de hacer daño</a:t>
             </a:r>
           </a:p>
           <a:p>
@@ -7131,7 +7224,7 @@
                 </a:solidFill>
                 <a:latin typeface="Nunito Sans"/>
               </a:rPr>
-              <a:t>B causa A</a:t>
+              <a:t>Repetición:</a:t>
             </a:r>
             <a:r>
               <a:rPr sz="2800" b="0">
@@ -7140,7 +7233,7 @@
                 </a:solidFill>
                 <a:latin typeface="Nunito Sans"/>
               </a:rPr>
-              <a:t> (al revés)</a:t>
+              <a:t> una publicación puede dañar una y otra vez</a:t>
             </a:r>
           </a:p>
           <a:p>
@@ -7165,7 +7258,7 @@
                 </a:solidFill>
                 <a:latin typeface="Nunito Sans"/>
               </a:rPr>
-              <a:t>Una tercera causa</a:t>
+              <a:t>Desequilibrio:</a:t>
             </a:r>
             <a:r>
               <a:rPr sz="2800" b="0">
@@ -7174,41 +7267,7 @@
                 </a:solidFill>
                 <a:latin typeface="Nunito Sans"/>
               </a:rPr>
-              <a:t> produce las dos</a:t>
-            </a:r>
-          </a:p>
-          <a:p>
-            <a:pPr>
-              <a:spcAft>
-                <a:spcPts val="1260"/>
-              </a:spcAft>
-            </a:pPr>
-            <a:r>
-              <a:rPr sz="2800" b="1">
-                <a:solidFill>
-                  <a:srgbClr val="E8793A"/>
-                </a:solidFill>
-                <a:latin typeface="Nunito Sans"/>
-              </a:rPr>
-              <a:t>• </a:t>
-            </a:r>
-            <a:r>
-              <a:rPr sz="2800" b="1">
-                <a:solidFill>
-                  <a:srgbClr val="1F2A44"/>
-                </a:solidFill>
-                <a:latin typeface="Nunito Sans"/>
-              </a:rPr>
-              <a:t>Casualidad:</a:t>
-            </a:r>
-            <a:r>
-              <a:rPr sz="2800" b="0">
-                <a:solidFill>
-                  <a:srgbClr val="1F2A44"/>
-                </a:solidFill>
-                <a:latin typeface="Nunito Sans"/>
-              </a:rPr>
-              <a:t> coinciden sin tener nada que ver</a:t>
+              <a:t> la víctima no puede defenderse fácilmente</a:t>
             </a:r>
           </a:p>
         </p:txBody>
@@ -7273,7 +7332,7 @@
                 </a:solidFill>
                 <a:latin typeface="Nunito Sans"/>
               </a:rPr>
-              <a:t>BLOQUE 1 · CORRELACIÓN NO ES CAUSA</a:t>
+              <a:t>BLOQUE 1 · POR QUÉ EN LAS REDES SE ESCALA MÁS</a:t>
             </a:r>
           </a:p>
         </p:txBody>
@@ -7312,7 +7371,7 @@
                 </a:solidFill>
                 <a:latin typeface="Fredoka"/>
               </a:rPr>
-              <a:t>Helados y ahogamientos (cifras inventadas)</a:t>
+              <a:t>Derechos y deberes en las redes</a:t>
             </a:r>
           </a:p>
         </p:txBody>
@@ -7336,9 +7395,8 @@
                 <a:tableStyleId>{5C22544A-7EE6-4342-B048-85BDC9FD1C3A}</a:tableStyleId>
               </a:tblPr>
               <a:tblGrid>
-                <a:gridCol w="3637333"/>
-                <a:gridCol w="3637333"/>
-                <a:gridCol w="3637334"/>
+                <a:gridCol w="5456000"/>
+                <a:gridCol w="5456000"/>
               </a:tblGrid>
               <a:tr h="600000">
                 <a:tc>
@@ -7353,7 +7411,7 @@
                           </a:solidFill>
                           <a:latin typeface="Fredoka"/>
                         </a:rPr>
-                        <a:t>Mes</a:t>
+                        <a:t>Tengo derecho a…</a:t>
                       </a:r>
                     </a:p>
                   </a:txBody>
@@ -7375,29 +7433,7 @@
                           </a:solidFill>
                           <a:latin typeface="Fredoka"/>
                         </a:rPr>
-                        <a:t>Helados vendidos</a:t>
-                      </a:r>
-                    </a:p>
-                  </a:txBody>
-                  <a:tcPr>
-                    <a:solidFill>
-                      <a:srgbClr val="1F2A44"/>
-                    </a:solidFill>
-                  </a:tcPr>
-                </a:tc>
-                <a:tc>
-                  <a:txBody>
-                    <a:bodyPr/>
-                    <a:lstStyle/>
-                    <a:p>
-                      <a:r>
-                        <a:rPr sz="2000" b="1">
-                          <a:solidFill>
-                            <a:srgbClr val="FBF7EF"/>
-                          </a:solidFill>
-                          <a:latin typeface="Fredoka"/>
-                        </a:rPr>
-                        <a:t>Personas ahogadas</a:t>
+                        <a:t>Por eso tengo el deber de…</a:t>
                       </a:r>
                     </a:p>
                   </a:txBody>
@@ -7415,13 +7451,22 @@
                     <a:lstStyle/>
                     <a:p>
                       <a:r>
+                        <a:rPr sz="2000" b="1">
+                          <a:solidFill>
+                            <a:srgbClr val="1F2A44"/>
+                          </a:solidFill>
+                          <a:latin typeface="Nunito Sans"/>
+                        </a:rPr>
+                        <a:t>Privacidad:</a:t>
+                      </a:r>
+                      <a:r>
                         <a:rPr sz="2000" b="0">
                           <a:solidFill>
                             <a:srgbClr val="1F2A44"/>
                           </a:solidFill>
                           <a:latin typeface="Nunito Sans"/>
                         </a:rPr>
-                        <a:t>Enero</a:t>
+                        <a:t> que mis mensajes privados sigan siendo privados</a:t>
                       </a:r>
                     </a:p>
                   </a:txBody>
@@ -7443,7 +7488,95 @@
                           </a:solidFill>
                           <a:latin typeface="Nunito Sans"/>
                         </a:rPr>
-                        <a:t>1.000</a:t>
+                        <a:t>No reenviar capturas de chats privados de otros</a:t>
+                      </a:r>
+                    </a:p>
+                  </a:txBody>
+                  <a:tcPr>
+                    <a:solidFill>
+                      <a:srgbClr val="FFFFFF"/>
+                    </a:solidFill>
+                  </a:tcPr>
+                </a:tc>
+              </a:tr>
+              <a:tr h="600000">
+                <a:tc>
+                  <a:txBody>
+                    <a:bodyPr/>
+                    <a:lstStyle/>
+                    <a:p>
+                      <a:r>
+                        <a:rPr sz="2000" b="1">
+                          <a:solidFill>
+                            <a:srgbClr val="1F2A44"/>
+                          </a:solidFill>
+                          <a:latin typeface="Nunito Sans"/>
+                        </a:rPr>
+                        <a:t>Propia imagen:</a:t>
+                      </a:r>
+                      <a:r>
+                        <a:rPr sz="2000" b="0">
+                          <a:solidFill>
+                            <a:srgbClr val="1F2A44"/>
+                          </a:solidFill>
+                          <a:latin typeface="Nunito Sans"/>
+                        </a:rPr>
+                        <a:t> decidir dónde sale mi foto</a:t>
+                      </a:r>
+                    </a:p>
+                  </a:txBody>
+                  <a:tcPr>
+                    <a:solidFill>
+                      <a:srgbClr val="EAF0F7"/>
+                    </a:solidFill>
+                  </a:tcPr>
+                </a:tc>
+                <a:tc>
+                  <a:txBody>
+                    <a:bodyPr/>
+                    <a:lstStyle/>
+                    <a:p>
+                      <a:r>
+                        <a:rPr sz="2000" b="0">
+                          <a:solidFill>
+                            <a:srgbClr val="1F2A44"/>
+                          </a:solidFill>
+                          <a:latin typeface="Nunito Sans"/>
+                        </a:rPr>
+                        <a:t>Pedir permiso antes de subir fotos o vídeos de otros</a:t>
+                      </a:r>
+                    </a:p>
+                  </a:txBody>
+                  <a:tcPr>
+                    <a:solidFill>
+                      <a:srgbClr val="EAF0F7"/>
+                    </a:solidFill>
+                  </a:tcPr>
+                </a:tc>
+              </a:tr>
+              <a:tr h="600000">
+                <a:tc>
+                  <a:txBody>
+                    <a:bodyPr/>
+                    <a:lstStyle/>
+                    <a:p>
+                      <a:r>
+                        <a:rPr sz="2000" b="1">
+                          <a:solidFill>
+                            <a:srgbClr val="1F2A44"/>
+                          </a:solidFill>
+                          <a:latin typeface="Nunito Sans"/>
+                        </a:rPr>
+                        <a:t>Respeto:</a:t>
+                      </a:r>
+                      <a:r>
+                        <a:rPr sz="2000" b="0">
+                          <a:solidFill>
+                            <a:srgbClr val="1F2A44"/>
+                          </a:solidFill>
+                          <a:latin typeface="Nunito Sans"/>
+                        </a:rPr>
+                        <a:t> que no me insulten ni me humillen</a:t>
                       </a:r>
                     </a:p>
                   </a:txBody>
@@ -7465,143 +7598,7 @@
                           </a:solidFill>
                           <a:latin typeface="Nunito Sans"/>
                         </a:rPr>
-                        <a:t>2</a:t>
-                      </a:r>
-                    </a:p>
-                  </a:txBody>
-                  <a:tcPr>
-                    <a:solidFill>
-                      <a:srgbClr val="FFFFFF"/>
-                    </a:solidFill>
-                  </a:tcPr>
-                </a:tc>
-              </a:tr>
-              <a:tr h="600000">
-                <a:tc>
-                  <a:txBody>
-                    <a:bodyPr/>
-                    <a:lstStyle/>
-                    <a:p>
-                      <a:r>
-                        <a:rPr sz="2000" b="0">
-                          <a:solidFill>
-                            <a:srgbClr val="1F2A44"/>
-                          </a:solidFill>
-                          <a:latin typeface="Nunito Sans"/>
-                        </a:rPr>
-                        <a:t>Abril</a:t>
-                      </a:r>
-                    </a:p>
-                  </a:txBody>
-                  <a:tcPr>
-                    <a:solidFill>
-                      <a:srgbClr val="EAF0F7"/>
-                    </a:solidFill>
-                  </a:tcPr>
-                </a:tc>
-                <a:tc>
-                  <a:txBody>
-                    <a:bodyPr/>
-                    <a:lstStyle/>
-                    <a:p>
-                      <a:r>
-                        <a:rPr sz="2000" b="0">
-                          <a:solidFill>
-                            <a:srgbClr val="1F2A44"/>
-                          </a:solidFill>
-                          <a:latin typeface="Nunito Sans"/>
-                        </a:rPr>
-                        <a:t>3.000</a:t>
-                      </a:r>
-                    </a:p>
-                  </a:txBody>
-                  <a:tcPr>
-                    <a:solidFill>
-                      <a:srgbClr val="EAF0F7"/>
-                    </a:solidFill>
-                  </a:tcPr>
-                </a:tc>
-                <a:tc>
-                  <a:txBody>
-                    <a:bodyPr/>
-                    <a:lstStyle/>
-                    <a:p>
-                      <a:r>
-                        <a:rPr sz="2000" b="0">
-                          <a:solidFill>
-                            <a:srgbClr val="1F2A44"/>
-                          </a:solidFill>
-                          <a:latin typeface="Nunito Sans"/>
-                        </a:rPr>
-                        <a:t>5</a:t>
-                      </a:r>
-                    </a:p>
-                  </a:txBody>
-                  <a:tcPr>
-                    <a:solidFill>
-                      <a:srgbClr val="EAF0F7"/>
-                    </a:solidFill>
-                  </a:tcPr>
-                </a:tc>
-              </a:tr>
-              <a:tr h="600000">
-                <a:tc>
-                  <a:txBody>
-                    <a:bodyPr/>
-                    <a:lstStyle/>
-                    <a:p>
-                      <a:r>
-                        <a:rPr sz="2000" b="0">
-                          <a:solidFill>
-                            <a:srgbClr val="1F2A44"/>
-                          </a:solidFill>
-                          <a:latin typeface="Nunito Sans"/>
-                        </a:rPr>
-                        <a:t>Julio</a:t>
-                      </a:r>
-                    </a:p>
-                  </a:txBody>
-                  <a:tcPr>
-                    <a:solidFill>
-                      <a:srgbClr val="FFFFFF"/>
-                    </a:solidFill>
-                  </a:tcPr>
-                </a:tc>
-                <a:tc>
-                  <a:txBody>
-                    <a:bodyPr/>
-                    <a:lstStyle/>
-                    <a:p>
-                      <a:r>
-                        <a:rPr sz="2000" b="0">
-                          <a:solidFill>
-                            <a:srgbClr val="1F2A44"/>
-                          </a:solidFill>
-                          <a:latin typeface="Nunito Sans"/>
-                        </a:rPr>
-                        <a:t>9.000</a:t>
-                      </a:r>
-                    </a:p>
-                  </a:txBody>
-                  <a:tcPr>
-                    <a:solidFill>
-                      <a:srgbClr val="FFFFFF"/>
-                    </a:solidFill>
-                  </a:tcPr>
-                </a:tc>
-                <a:tc>
-                  <a:txBody>
-                    <a:bodyPr/>
-                    <a:lstStyle/>
-                    <a:p>
-                      <a:r>
-                        <a:rPr sz="2000" b="0">
-                          <a:solidFill>
-                            <a:srgbClr val="1F2A44"/>
-                          </a:solidFill>
-                          <a:latin typeface="Nunito Sans"/>
-                        </a:rPr>
-                        <a:t>12</a:t>
+                        <a:t>No insultar ni humillar, aunque sea desde el anonimato</a:t>
                       </a:r>
                     </a:p>
                   </a:txBody>
